--- a/report/slides/slides.pptx
+++ b/report/slides/slides.pptx
@@ -4628,7 +4628,7 @@
             <a:pPr lvl="0"/>
             <a:r>
               <a:rPr/>
-              <a:t>Pendenti dal DB, struttura di cartelle preservata</a:t>
+              <a:t>Pendenti dal DB</a:t>
             </a:r>
           </a:p>
           <a:p>
@@ -4676,13 +4676,6 @@
             <a:r>
               <a:rPr/>
               <a:t> a conferma di un trasferimento</a:t>
-            </a:r>
-          </a:p>
-          <a:p>
-            <a:pPr lvl="1"/>
-            <a:r>
-              <a:rPr/>
-              <a:t>display: barra, nome del file, contatori; nessun accoppiamento con il core</a:t>
             </a:r>
           </a:p>
           <a:p>
@@ -5187,7 +5180,7 @@
             </a:r>
             <a:r>
               <a:rPr/>
-              <a:t> (Dropbox, Drive, S3, Backblaze, SFTP), WebDAV nativo o un percorso locale</a:t>
+              <a:t> (Dropbox, Drive, S3, …) o WebDAV nativo</a:t>
             </a:r>
           </a:p>
           <a:p>
@@ -5202,13 +5195,6 @@
             </a:r>
           </a:p>
           <a:p>
-            <a:pPr lvl="1"/>
-            <a:r>
-              <a:rPr/>
-              <a:t>remoto svuotato → nuova destinazione, nessun ri-upload dei vecchi file</a:t>
-            </a:r>
-          </a:p>
-          <a:p>
             <a:pPr lvl="0"/>
             <a:r>
               <a:rPr b="1"/>
@@ -5237,7 +5223,7 @@
             <a:pPr lvl="0"/>
             <a:r>
               <a:rPr/>
-              <a:t>Ogni impostazione da menù a bordo o dalla pagina web, salvata su </a:t>
+              <a:t>Ogni impostazione da menù o dalla pagina web, salvata su </a:t>
             </a:r>
             <a:r>
               <a:rPr>
@@ -6069,7 +6055,7 @@
             </a:r>
             <a:r>
               <a:rPr/>
-              <a:t> + spedizione, con sd, latta, viti, fili e biadesivo</a:t>
+              <a:t> (con sd, latta, viti, fili e biadesivo) + spedizione</a:t>
             </a:r>
           </a:p>
           <a:p>
